--- a/docs/Презентация_защита_ШколаПоАдресу.pptx
+++ b/docs/Презентация_защита_ШколаПоАдресу.pptx
@@ -297,7 +297,7 @@
           <a:p>
             <a:fld id="{73261BF4-8B2C-784B-9959-B59A059012C3}" type="datetimeFigureOut">
               <a:rPr lang="en-RU" smtClean="0"/>
-              <a:t>6/18/26</a:t>
+              <a:t>6/19/26</a:t>
             </a:fld>
             <a:endParaRPr lang="en-RU"/>
           </a:p>
@@ -14200,24 +14200,204 @@
         </p:nvSpPr>
         <p:spPr>
           <a:xfrm>
-            <a:off x="1027967" y="2404670"/>
-            <a:ext cx="10104631" cy="1978323"/>
+            <a:off x="1027967" y="2404671"/>
+            <a:ext cx="10104631" cy="1306718"/>
           </a:xfrm>
         </p:spPr>
         <p:txBody>
           <a:bodyPr wrap="square">
-            <a:normAutofit fontScale="90000"/>
+            <a:normAutofit/>
           </a:bodyPr>
           <a:lstStyle/>
           <a:p>
             <a:r>
-              <a:rPr sz="2600" b="1">
+              <a:rPr sz="2600" b="1" dirty="0" err="1">
                 <a:solidFill>
                   <a:srgbClr val="0F2C68"/>
                 </a:solidFill>
                 <a:latin typeface="HSE Sans"/>
               </a:rPr>
-              <a:t>Разработка веб-сервиса определения школы по адресу проживания на основе муниципальных постановлений</a:t>
+              <a:t>Разработка</a:t>
+            </a:r>
+            <a:r>
+              <a:rPr sz="2600" b="1" dirty="0">
+                <a:solidFill>
+                  <a:srgbClr val="0F2C68"/>
+                </a:solidFill>
+                <a:latin typeface="HSE Sans"/>
+              </a:rPr>
+              <a:t> </a:t>
+            </a:r>
+            <a:r>
+              <a:rPr sz="2600" b="1" dirty="0" err="1">
+                <a:solidFill>
+                  <a:srgbClr val="0F2C68"/>
+                </a:solidFill>
+                <a:latin typeface="HSE Sans"/>
+              </a:rPr>
+              <a:t>веб-сервиса</a:t>
+            </a:r>
+            <a:r>
+              <a:rPr sz="2600" b="1" dirty="0">
+                <a:solidFill>
+                  <a:srgbClr val="0F2C68"/>
+                </a:solidFill>
+                <a:latin typeface="HSE Sans"/>
+              </a:rPr>
+              <a:t> </a:t>
+            </a:r>
+            <a:r>
+              <a:rPr sz="2600" b="1" dirty="0" err="1">
+                <a:solidFill>
+                  <a:srgbClr val="0F2C68"/>
+                </a:solidFill>
+                <a:latin typeface="HSE Sans"/>
+              </a:rPr>
+              <a:t>определения</a:t>
+            </a:r>
+            <a:r>
+              <a:rPr sz="2600" b="1" dirty="0">
+                <a:solidFill>
+                  <a:srgbClr val="0F2C68"/>
+                </a:solidFill>
+                <a:latin typeface="HSE Sans"/>
+              </a:rPr>
+              <a:t> </a:t>
+            </a:r>
+            <a:r>
+              <a:rPr sz="2600" b="1" dirty="0" err="1">
+                <a:solidFill>
+                  <a:srgbClr val="0F2C68"/>
+                </a:solidFill>
+                <a:latin typeface="HSE Sans"/>
+              </a:rPr>
+              <a:t>школы</a:t>
+            </a:r>
+            <a:r>
+              <a:rPr sz="2600" b="1" dirty="0">
+                <a:solidFill>
+                  <a:srgbClr val="0F2C68"/>
+                </a:solidFill>
+                <a:latin typeface="HSE Sans"/>
+              </a:rPr>
+              <a:t> </a:t>
+            </a:r>
+            <a:r>
+              <a:rPr sz="2600" b="1" dirty="0" err="1">
+                <a:solidFill>
+                  <a:srgbClr val="0F2C68"/>
+                </a:solidFill>
+                <a:latin typeface="HSE Sans"/>
+              </a:rPr>
+              <a:t>по</a:t>
+            </a:r>
+            <a:r>
+              <a:rPr sz="2600" b="1" dirty="0">
+                <a:solidFill>
+                  <a:srgbClr val="0F2C68"/>
+                </a:solidFill>
+                <a:latin typeface="HSE Sans"/>
+              </a:rPr>
+              <a:t> </a:t>
+            </a:r>
+            <a:r>
+              <a:rPr sz="2600" b="1" dirty="0" err="1">
+                <a:solidFill>
+                  <a:srgbClr val="0F2C68"/>
+                </a:solidFill>
+                <a:latin typeface="HSE Sans"/>
+              </a:rPr>
+              <a:t>адресу</a:t>
+            </a:r>
+            <a:r>
+              <a:rPr sz="2600" b="1" dirty="0">
+                <a:solidFill>
+                  <a:srgbClr val="0F2C68"/>
+                </a:solidFill>
+                <a:latin typeface="HSE Sans"/>
+              </a:rPr>
+              <a:t> </a:t>
+            </a:r>
+            <a:r>
+              <a:rPr sz="2600" b="1" dirty="0" err="1">
+                <a:solidFill>
+                  <a:srgbClr val="0F2C68"/>
+                </a:solidFill>
+                <a:latin typeface="HSE Sans"/>
+              </a:rPr>
+              <a:t>проживания</a:t>
+            </a:r>
+            <a:r>
+              <a:rPr sz="2600" b="1" dirty="0">
+                <a:solidFill>
+                  <a:srgbClr val="0F2C68"/>
+                </a:solidFill>
+                <a:latin typeface="HSE Sans"/>
+              </a:rPr>
+              <a:t> </a:t>
+            </a:r>
+            <a:r>
+              <a:rPr sz="2600" b="1" dirty="0" err="1">
+                <a:solidFill>
+                  <a:srgbClr val="0F2C68"/>
+                </a:solidFill>
+                <a:latin typeface="HSE Sans"/>
+              </a:rPr>
+              <a:t>на</a:t>
+            </a:r>
+            <a:r>
+              <a:rPr sz="2600" b="1" dirty="0">
+                <a:solidFill>
+                  <a:srgbClr val="0F2C68"/>
+                </a:solidFill>
+                <a:latin typeface="HSE Sans"/>
+              </a:rPr>
+              <a:t> </a:t>
+            </a:r>
+            <a:r>
+              <a:rPr sz="2600" b="1" dirty="0" err="1">
+                <a:solidFill>
+                  <a:srgbClr val="0F2C68"/>
+                </a:solidFill>
+                <a:latin typeface="HSE Sans"/>
+              </a:rPr>
+              <a:t>основе</a:t>
+            </a:r>
+            <a:r>
+              <a:rPr sz="2600" b="1" dirty="0">
+                <a:solidFill>
+                  <a:srgbClr val="0F2C68"/>
+                </a:solidFill>
+                <a:latin typeface="HSE Sans"/>
+              </a:rPr>
+              <a:t> </a:t>
+            </a:r>
+            <a:r>
+              <a:rPr sz="2600" b="1" dirty="0" err="1">
+                <a:solidFill>
+                  <a:srgbClr val="0F2C68"/>
+                </a:solidFill>
+                <a:latin typeface="HSE Sans"/>
+              </a:rPr>
+              <a:t>муниципальных</a:t>
+            </a:r>
+            <a:r>
+              <a:rPr sz="2600" b="1" dirty="0">
+                <a:solidFill>
+                  <a:srgbClr val="0F2C68"/>
+                </a:solidFill>
+                <a:latin typeface="HSE Sans"/>
+              </a:rPr>
+              <a:t> </a:t>
+            </a:r>
+            <a:r>
+              <a:rPr sz="2600" b="1" dirty="0" err="1">
+                <a:solidFill>
+                  <a:srgbClr val="0F2C68"/>
+                </a:solidFill>
+                <a:latin typeface="HSE Sans"/>
+              </a:rPr>
+              <a:t>постановлений</a:t>
             </a:r>
             <a:endParaRPr lang="ru-RU" dirty="0"/>
           </a:p>
@@ -16341,8 +16521,8 @@
         </p:nvSpPr>
         <p:spPr>
           <a:xfrm>
-            <a:off x="502920" y="6446520"/>
-            <a:ext cx="11155680" cy="365760"/>
+            <a:off x="502920" y="6144768"/>
+            <a:ext cx="11155680" cy="640080"/>
           </a:xfrm>
           <a:prstGeom prst="rect">
             <a:avLst/>
@@ -17121,7 +17301,7 @@
                 </a:solidFill>
                 <a:latin typeface="HSE Sans"/>
               </a:rPr>
-              <a:t>структурно</a:t>
+              <a:t>полностью структурно</a:t>
             </a:r>
             <a:r>
               <a:rPr sz="1400" b="0" dirty="0">
@@ -20982,7 +21162,7 @@
                 </a:solidFill>
                 <a:latin typeface="HSE Sans"/>
               </a:rPr>
-              <a:t>Ручные регрессионные сценарии TC-001 — TC-021 на 4 реальных постановлениях.</a:t>
+              <a:t>21 регрессионный сценарий из каталога 34 тест-кейсов — на 4 реальных постановлениях.</a:t>
             </a:r>
           </a:p>
           <a:p>
@@ -21316,7 +21496,7 @@
         </p:nvGraphicFramePr>
         <p:xfrm>
           <a:off x="548640" y="1828800"/>
-          <a:ext cx="5486400" cy="2907792"/>
+          <a:ext cx="5486400" cy="2761488"/>
         </p:xfrm>
         <a:graphic>
           <a:graphicData uri="http://schemas.openxmlformats.org/drawingml/2006/table">
@@ -21325,35 +21505,35 @@
                 <a:tableStyleId>{5C22544A-7EE6-4342-B048-85BDC9FD1C3A}</a:tableStyleId>
               </a:tblPr>
               <a:tblGrid>
-                <a:gridCol w="1554480">
+                <a:gridCol w="1371600">
                   <a:extLst>
                     <a:ext uri="{9D8B030D-6E8A-4147-A177-3AD203B41FA5}">
                       <a16:colId xmlns:a16="http://schemas.microsoft.com/office/drawing/2014/main" val="20000"/>
                     </a:ext>
                   </a:extLst>
                 </a:gridCol>
-                <a:gridCol w="731520">
+                <a:gridCol w="914400">
                   <a:extLst>
                     <a:ext uri="{9D8B030D-6E8A-4147-A177-3AD203B41FA5}">
                       <a16:colId xmlns:a16="http://schemas.microsoft.com/office/drawing/2014/main" val="20001"/>
                     </a:ext>
                   </a:extLst>
                 </a:gridCol>
-                <a:gridCol w="1005840">
+                <a:gridCol w="914400">
                   <a:extLst>
                     <a:ext uri="{9D8B030D-6E8A-4147-A177-3AD203B41FA5}">
                       <a16:colId xmlns:a16="http://schemas.microsoft.com/office/drawing/2014/main" val="20002"/>
                     </a:ext>
                   </a:extLst>
                 </a:gridCol>
-                <a:gridCol w="1188720">
+                <a:gridCol w="1097280">
                   <a:extLst>
                     <a:ext uri="{9D8B030D-6E8A-4147-A177-3AD203B41FA5}">
                       <a16:colId xmlns:a16="http://schemas.microsoft.com/office/drawing/2014/main" val="20003"/>
                     </a:ext>
                   </a:extLst>
                 </a:gridCol>
-                <a:gridCol w="1005840">
+                <a:gridCol w="1188720">
                   <a:extLst>
                     <a:ext uri="{9D8B030D-6E8A-4147-A177-3AD203B41FA5}">
                       <a16:colId xmlns:a16="http://schemas.microsoft.com/office/drawing/2014/main" val="20004"/>
@@ -21368,7 +21548,7 @@
                     <a:lstStyle/>
                     <a:p>
                       <a:r>
-                        <a:rPr sz="1250" b="1">
+                        <a:rPr sz="1100" b="1">
                           <a:solidFill>
                             <a:srgbClr val="FFFFFF"/>
                           </a:solidFill>
@@ -21390,7 +21570,7 @@
                     <a:lstStyle/>
                     <a:p>
                       <a:r>
-                        <a:rPr sz="1250" b="1">
+                        <a:rPr sz="1100" b="1">
                           <a:solidFill>
                             <a:srgbClr val="FFFFFF"/>
                           </a:solidFill>
@@ -21412,7 +21592,7 @@
                     <a:lstStyle/>
                     <a:p>
                       <a:r>
-                        <a:rPr sz="1250" b="1">
+                        <a:rPr sz="1100" b="1">
                           <a:solidFill>
                             <a:srgbClr val="FFFFFF"/>
                           </a:solidFill>
@@ -21434,7 +21614,7 @@
                     <a:lstStyle/>
                     <a:p>
                       <a:r>
-                        <a:rPr sz="1250" b="1">
+                        <a:rPr sz="1100" b="1">
                           <a:solidFill>
                             <a:srgbClr val="FFFFFF"/>
                           </a:solidFill>
@@ -21456,7 +21636,7 @@
                     <a:lstStyle/>
                     <a:p>
                       <a:r>
-                        <a:rPr sz="1250" b="1">
+                        <a:rPr sz="1100" b="1">
                           <a:solidFill>
                             <a:srgbClr val="FFFFFF"/>
                           </a:solidFill>
@@ -21959,7 +22139,7 @@
         <p:spPr>
           <a:xfrm>
             <a:off x="548640" y="1463040"/>
-            <a:ext cx="5486400" cy="365760"/>
+            <a:ext cx="5486400" cy="292388"/>
           </a:xfrm>
           <a:prstGeom prst="rect">
             <a:avLst/>
@@ -21973,13 +22153,92 @@
           <a:lstStyle/>
           <a:p>
             <a:r>
-              <a:rPr sz="1300" b="1">
-                <a:solidFill>
-                  <a:srgbClr val="ED7D31"/>
-                </a:solidFill>
-                <a:latin typeface="HSE Sans"/>
-              </a:rPr>
-              <a:t>Нагрузочное тестирование на ≈700 правилах (MacBook Pro M1 / SQLite).</a:t>
+              <a:rPr sz="1300" b="1" dirty="0" err="1">
+                <a:solidFill>
+                  <a:schemeClr val="accent1">
+                    <a:lumMod val="75000"/>
+                  </a:schemeClr>
+                </a:solidFill>
+                <a:latin typeface="HSE Sans"/>
+              </a:rPr>
+              <a:t>Нагрузочное</a:t>
+            </a:r>
+            <a:r>
+              <a:rPr sz="1300" b="1" dirty="0">
+                <a:solidFill>
+                  <a:schemeClr val="accent1">
+                    <a:lumMod val="75000"/>
+                  </a:schemeClr>
+                </a:solidFill>
+                <a:latin typeface="HSE Sans"/>
+              </a:rPr>
+              <a:t> </a:t>
+            </a:r>
+            <a:r>
+              <a:rPr sz="1300" b="1" dirty="0" err="1">
+                <a:solidFill>
+                  <a:schemeClr val="accent1">
+                    <a:lumMod val="75000"/>
+                  </a:schemeClr>
+                </a:solidFill>
+                <a:latin typeface="HSE Sans"/>
+              </a:rPr>
+              <a:t>тестирование</a:t>
+            </a:r>
+            <a:r>
+              <a:rPr sz="1300" b="1" dirty="0">
+                <a:solidFill>
+                  <a:schemeClr val="accent1">
+                    <a:lumMod val="75000"/>
+                  </a:schemeClr>
+                </a:solidFill>
+                <a:latin typeface="HSE Sans"/>
+              </a:rPr>
+              <a:t> </a:t>
+            </a:r>
+            <a:r>
+              <a:rPr sz="1300" b="1" dirty="0" err="1">
+                <a:solidFill>
+                  <a:schemeClr val="accent1">
+                    <a:lumMod val="75000"/>
+                  </a:schemeClr>
+                </a:solidFill>
+                <a:latin typeface="HSE Sans"/>
+              </a:rPr>
+              <a:t>на</a:t>
+            </a:r>
+            <a:r>
+              <a:rPr sz="1300" b="1" dirty="0">
+                <a:solidFill>
+                  <a:schemeClr val="accent1">
+                    <a:lumMod val="75000"/>
+                  </a:schemeClr>
+                </a:solidFill>
+                <a:latin typeface="HSE Sans"/>
+              </a:rPr>
+              <a:t> ≈700 </a:t>
+            </a:r>
+            <a:r>
+              <a:rPr sz="1300" b="1" dirty="0" err="1">
+                <a:solidFill>
+                  <a:schemeClr val="accent1">
+                    <a:lumMod val="75000"/>
+                  </a:schemeClr>
+                </a:solidFill>
+                <a:latin typeface="HSE Sans"/>
+              </a:rPr>
+              <a:t>правилах</a:t>
+            </a:r>
+            <a:r>
+              <a:rPr sz="1300" b="1" dirty="0">
+                <a:solidFill>
+                  <a:schemeClr val="accent1">
+                    <a:lumMod val="75000"/>
+                  </a:schemeClr>
+                </a:solidFill>
+                <a:latin typeface="HSE Sans"/>
+              </a:rPr>
+              <a:t> (MacBook Pro M1 / SQLite).</a:t>
             </a:r>
           </a:p>
         </p:txBody>
@@ -22372,7 +22631,7 @@
         <p:spPr>
           <a:xfrm>
             <a:off x="6400800" y="1463040"/>
-            <a:ext cx="5486400" cy="365760"/>
+            <a:ext cx="5486400" cy="492443"/>
           </a:xfrm>
           <a:prstGeom prst="rect">
             <a:avLst/>
@@ -22386,13 +22645,246 @@
           <a:lstStyle/>
           <a:p>
             <a:r>
-              <a:rPr sz="1300" b="1">
-                <a:solidFill>
-                  <a:srgbClr val="ED7D31"/>
-                </a:solidFill>
-                <a:latin typeface="HSE Sans"/>
-              </a:rPr>
-              <a:t>Журнал из 10 значимых дефектов: 8 устранены, 2 приняты как технический долг учебного прототипа.</a:t>
+              <a:rPr sz="1300" b="1" dirty="0" err="1">
+                <a:solidFill>
+                  <a:schemeClr val="accent1">
+                    <a:lumMod val="75000"/>
+                  </a:schemeClr>
+                </a:solidFill>
+                <a:latin typeface="HSE Sans"/>
+              </a:rPr>
+              <a:t>Журнал</a:t>
+            </a:r>
+            <a:r>
+              <a:rPr sz="1300" b="1" dirty="0">
+                <a:solidFill>
+                  <a:schemeClr val="accent1">
+                    <a:lumMod val="75000"/>
+                  </a:schemeClr>
+                </a:solidFill>
+                <a:latin typeface="HSE Sans"/>
+              </a:rPr>
+              <a:t> </a:t>
+            </a:r>
+            <a:r>
+              <a:rPr sz="1300" b="1" dirty="0" err="1">
+                <a:solidFill>
+                  <a:schemeClr val="accent1">
+                    <a:lumMod val="75000"/>
+                  </a:schemeClr>
+                </a:solidFill>
+                <a:latin typeface="HSE Sans"/>
+              </a:rPr>
+              <a:t>из</a:t>
+            </a:r>
+            <a:r>
+              <a:rPr sz="1300" b="1" dirty="0">
+                <a:solidFill>
+                  <a:schemeClr val="accent1">
+                    <a:lumMod val="75000"/>
+                  </a:schemeClr>
+                </a:solidFill>
+                <a:latin typeface="HSE Sans"/>
+              </a:rPr>
+              <a:t> 10 </a:t>
+            </a:r>
+            <a:r>
+              <a:rPr sz="1300" b="1" dirty="0" err="1">
+                <a:solidFill>
+                  <a:schemeClr val="accent1">
+                    <a:lumMod val="75000"/>
+                  </a:schemeClr>
+                </a:solidFill>
+                <a:latin typeface="HSE Sans"/>
+              </a:rPr>
+              <a:t>значимых</a:t>
+            </a:r>
+            <a:r>
+              <a:rPr sz="1300" b="1" dirty="0">
+                <a:solidFill>
+                  <a:schemeClr val="accent1">
+                    <a:lumMod val="75000"/>
+                  </a:schemeClr>
+                </a:solidFill>
+                <a:latin typeface="HSE Sans"/>
+              </a:rPr>
+              <a:t> </a:t>
+            </a:r>
+            <a:r>
+              <a:rPr sz="1300" b="1" dirty="0" err="1">
+                <a:solidFill>
+                  <a:schemeClr val="accent1">
+                    <a:lumMod val="75000"/>
+                  </a:schemeClr>
+                </a:solidFill>
+                <a:latin typeface="HSE Sans"/>
+              </a:rPr>
+              <a:t>дефектов</a:t>
+            </a:r>
+            <a:r>
+              <a:rPr sz="1300" b="1" dirty="0">
+                <a:solidFill>
+                  <a:schemeClr val="accent1">
+                    <a:lumMod val="75000"/>
+                  </a:schemeClr>
+                </a:solidFill>
+                <a:latin typeface="HSE Sans"/>
+              </a:rPr>
+              <a:t>: 8 </a:t>
+            </a:r>
+            <a:r>
+              <a:rPr sz="1300" b="1" dirty="0" err="1">
+                <a:solidFill>
+                  <a:schemeClr val="accent1">
+                    <a:lumMod val="75000"/>
+                  </a:schemeClr>
+                </a:solidFill>
+                <a:latin typeface="HSE Sans"/>
+              </a:rPr>
+              <a:t>устранены</a:t>
+            </a:r>
+            <a:r>
+              <a:rPr sz="1300" b="1" dirty="0">
+                <a:solidFill>
+                  <a:schemeClr val="accent1">
+                    <a:lumMod val="75000"/>
+                  </a:schemeClr>
+                </a:solidFill>
+                <a:latin typeface="HSE Sans"/>
+              </a:rPr>
+              <a:t>, 2 </a:t>
+            </a:r>
+            <a:r>
+              <a:rPr sz="1300" b="1" dirty="0" err="1">
+                <a:solidFill>
+                  <a:schemeClr val="accent1">
+                    <a:lumMod val="75000"/>
+                  </a:schemeClr>
+                </a:solidFill>
+                <a:latin typeface="HSE Sans"/>
+              </a:rPr>
+              <a:t>приняты</a:t>
+            </a:r>
+            <a:r>
+              <a:rPr sz="1300" b="1" dirty="0">
+                <a:solidFill>
+                  <a:schemeClr val="accent1">
+                    <a:lumMod val="75000"/>
+                  </a:schemeClr>
+                </a:solidFill>
+                <a:latin typeface="HSE Sans"/>
+              </a:rPr>
+              <a:t> </a:t>
+            </a:r>
+            <a:r>
+              <a:rPr sz="1300" b="1" dirty="0" err="1">
+                <a:solidFill>
+                  <a:schemeClr val="accent1">
+                    <a:lumMod val="75000"/>
+                  </a:schemeClr>
+                </a:solidFill>
+                <a:latin typeface="HSE Sans"/>
+              </a:rPr>
+              <a:t>как</a:t>
+            </a:r>
+            <a:r>
+              <a:rPr sz="1300" b="1" dirty="0">
+                <a:solidFill>
+                  <a:schemeClr val="accent1">
+                    <a:lumMod val="75000"/>
+                  </a:schemeClr>
+                </a:solidFill>
+                <a:latin typeface="HSE Sans"/>
+              </a:rPr>
+              <a:t> </a:t>
+            </a:r>
+            <a:r>
+              <a:rPr sz="1300" b="1" dirty="0" err="1">
+                <a:solidFill>
+                  <a:schemeClr val="accent1">
+                    <a:lumMod val="75000"/>
+                  </a:schemeClr>
+                </a:solidFill>
+                <a:latin typeface="HSE Sans"/>
+              </a:rPr>
+              <a:t>технический</a:t>
+            </a:r>
+            <a:r>
+              <a:rPr sz="1300" b="1" dirty="0">
+                <a:solidFill>
+                  <a:schemeClr val="accent1">
+                    <a:lumMod val="75000"/>
+                  </a:schemeClr>
+                </a:solidFill>
+                <a:latin typeface="HSE Sans"/>
+              </a:rPr>
+              <a:t> </a:t>
+            </a:r>
+            <a:r>
+              <a:rPr sz="1300" b="1" dirty="0" err="1">
+                <a:solidFill>
+                  <a:schemeClr val="accent1">
+                    <a:lumMod val="75000"/>
+                  </a:schemeClr>
+                </a:solidFill>
+                <a:latin typeface="HSE Sans"/>
+              </a:rPr>
+              <a:t>долг</a:t>
+            </a:r>
+            <a:r>
+              <a:rPr sz="1300" b="1" dirty="0">
+                <a:solidFill>
+                  <a:schemeClr val="accent1">
+                    <a:lumMod val="75000"/>
+                  </a:schemeClr>
+                </a:solidFill>
+                <a:latin typeface="HSE Sans"/>
+              </a:rPr>
+              <a:t> </a:t>
+            </a:r>
+            <a:r>
+              <a:rPr sz="1300" b="1" dirty="0" err="1">
+                <a:solidFill>
+                  <a:schemeClr val="accent1">
+                    <a:lumMod val="75000"/>
+                  </a:schemeClr>
+                </a:solidFill>
+                <a:latin typeface="HSE Sans"/>
+              </a:rPr>
+              <a:t>учебного</a:t>
+            </a:r>
+            <a:r>
+              <a:rPr sz="1300" b="1" dirty="0">
+                <a:solidFill>
+                  <a:schemeClr val="accent1">
+                    <a:lumMod val="75000"/>
+                  </a:schemeClr>
+                </a:solidFill>
+                <a:latin typeface="HSE Sans"/>
+              </a:rPr>
+              <a:t> </a:t>
+            </a:r>
+            <a:r>
+              <a:rPr sz="1300" b="1" dirty="0" err="1">
+                <a:solidFill>
+                  <a:schemeClr val="accent1">
+                    <a:lumMod val="75000"/>
+                  </a:schemeClr>
+                </a:solidFill>
+                <a:latin typeface="HSE Sans"/>
+              </a:rPr>
+              <a:t>прототипа</a:t>
+            </a:r>
+            <a:r>
+              <a:rPr sz="1300" b="1" dirty="0">
+                <a:solidFill>
+                  <a:schemeClr val="accent1">
+                    <a:lumMod val="75000"/>
+                  </a:schemeClr>
+                </a:solidFill>
+                <a:latin typeface="HSE Sans"/>
+              </a:rPr>
+              <a:t>.</a:t>
             </a:r>
           </a:p>
         </p:txBody>
@@ -22447,7 +22939,7 @@
                 </a:solidFill>
                 <a:latin typeface="HSE Sans"/>
               </a:rPr>
-              <a:t>•  Подтверждены требования NF-01 (отклик), функциональные FR-01…FR-11 — на реальных постановлениях.</a:t>
+              <a:t>•  Подтверждены требования NF-01 (отклик), функциональные F-01…F-11 — на реальных постановлениях.</a:t>
             </a:r>
           </a:p>
           <a:p>
@@ -22722,7 +23214,7 @@
                 </a:solidFill>
                 <a:latin typeface="HSE Sans"/>
               </a:rPr>
-              <a:t>•  Структурный анализ до LLM + три уровня fallback (DaData, GigaChat, ocr.space) — устойчивость.</a:t>
+              <a:t>•  Структурный анализ до LLM + деградация внешних сервисов: DaData → regex, GigaChat → retry, скан-PDF → OCR — устойчивость.</a:t>
             </a:r>
           </a:p>
           <a:p>
@@ -22887,7 +23379,7 @@
                 </a:solidFill>
                 <a:latin typeface="HSE Sans"/>
               </a:rPr>
-              <a:t>закрытие</a:t>
+              <a:t>усиление безопасности загрузки файлов</a:t>
             </a:r>
             <a:r>
               <a:rPr sz="1400" dirty="0">
@@ -22896,7 +23388,7 @@
                 </a:solidFill>
                 <a:latin typeface="HSE Sans"/>
               </a:rPr>
-              <a:t> path traversal (BUG-002).</a:t>
+              <a:t>.</a:t>
             </a:r>
           </a:p>
           <a:p>
@@ -23365,7 +23857,7 @@
                 </a:solidFill>
                 <a:latin typeface="HSE Sans"/>
               </a:rPr>
-              <a:t>порталов.Интеграция</a:t>
+              <a:t>порталов. Интеграция</a:t>
             </a:r>
             <a:r>
               <a:rPr sz="1400" dirty="0">
@@ -24146,7 +24638,7 @@
         </p:nvSpPr>
         <p:spPr>
           <a:xfrm>
-            <a:off x="7498079" y="1783080"/>
+            <a:off x="7498079" y="2103120"/>
             <a:ext cx="4206240" cy="1325880"/>
           </a:xfrm>
           <a:prstGeom prst="rect">
@@ -24376,7 +24868,7 @@
         </p:nvSpPr>
         <p:spPr>
           <a:xfrm>
-            <a:off x="7498079" y="3291840"/>
+            <a:off x="7498079" y="3977640"/>
             <a:ext cx="4206240" cy="1417320"/>
           </a:xfrm>
           <a:prstGeom prst="rect">
@@ -24621,308 +25113,6 @@
                 <a:latin typeface="HSE Sans"/>
               </a:rPr>
               <a:t>правилом-основанием</a:t>
-            </a:r>
-            <a:r>
-              <a:rPr sz="1600" dirty="0">
-                <a:solidFill>
-                  <a:srgbClr val="595959"/>
-                </a:solidFill>
-                <a:latin typeface="HSE Sans"/>
-              </a:rPr>
-              <a:t>.</a:t>
-            </a:r>
-          </a:p>
-        </p:txBody>
-      </p:sp>
-      <p:sp>
-        <p:nvSpPr>
-          <p:cNvPr id="9" name="Rectangle 8"/>
-          <p:cNvSpPr/>
-          <p:nvPr/>
-        </p:nvSpPr>
-        <p:spPr>
-          <a:xfrm>
-            <a:off x="7498079" y="4892040"/>
-            <a:ext cx="4206240" cy="1325880"/>
-          </a:xfrm>
-          <a:prstGeom prst="rect">
-            <a:avLst/>
-          </a:prstGeom>
-          <a:solidFill>
-            <a:srgbClr val="FDEFE3"/>
-          </a:solidFill>
-          <a:ln w="9525">
-            <a:solidFill>
-              <a:srgbClr val="0F2C68"/>
-            </a:solidFill>
-          </a:ln>
-          <a:effectLst/>
-        </p:spPr>
-        <p:style>
-          <a:lnRef idx="1">
-            <a:schemeClr val="accent1"/>
-          </a:lnRef>
-          <a:fillRef idx="3">
-            <a:schemeClr val="accent1"/>
-          </a:fillRef>
-          <a:effectRef idx="2">
-            <a:schemeClr val="accent1"/>
-          </a:effectRef>
-          <a:fontRef idx="minor">
-            <a:schemeClr val="lt1"/>
-          </a:fontRef>
-        </p:style>
-        <p:txBody>
-          <a:bodyPr wrap="square" lIns="101600" tIns="101600" rIns="101600" bIns="101600" rtlCol="0" anchor="t"/>
-          <a:lstStyle/>
-          <a:p>
-            <a:pPr algn="ctr"/>
-            <a:r>
-              <a:rPr sz="1500" b="1" dirty="0" err="1">
-                <a:solidFill>
-                  <a:srgbClr val="0F2C68"/>
-                </a:solidFill>
-                <a:latin typeface="HSE Sans"/>
-              </a:rPr>
-              <a:t>Отличие</a:t>
-            </a:r>
-            <a:endParaRPr sz="1500" b="1" dirty="0">
-              <a:solidFill>
-                <a:srgbClr val="0F2C68"/>
-              </a:solidFill>
-              <a:latin typeface="HSE Sans"/>
-            </a:endParaRPr>
-          </a:p>
-          <a:p>
-            <a:pPr>
-              <a:spcBef>
-                <a:spcPts val="300"/>
-              </a:spcBef>
-            </a:pPr>
-            <a:r>
-              <a:rPr sz="1600" dirty="0" err="1">
-                <a:solidFill>
-                  <a:srgbClr val="595959"/>
-                </a:solidFill>
-                <a:latin typeface="HSE Sans"/>
-              </a:rPr>
-              <a:t>Структурный</a:t>
-            </a:r>
-            <a:r>
-              <a:rPr sz="1600" dirty="0">
-                <a:solidFill>
-                  <a:srgbClr val="595959"/>
-                </a:solidFill>
-                <a:latin typeface="HSE Sans"/>
-              </a:rPr>
-              <a:t> </a:t>
-            </a:r>
-            <a:r>
-              <a:rPr sz="1600" dirty="0" err="1">
-                <a:solidFill>
-                  <a:srgbClr val="595959"/>
-                </a:solidFill>
-                <a:latin typeface="HSE Sans"/>
-              </a:rPr>
-              <a:t>анализ</a:t>
-            </a:r>
-            <a:r>
-              <a:rPr sz="1600" dirty="0">
-                <a:solidFill>
-                  <a:srgbClr val="595959"/>
-                </a:solidFill>
-                <a:latin typeface="HSE Sans"/>
-              </a:rPr>
-              <a:t> </a:t>
-            </a:r>
-            <a:r>
-              <a:rPr sz="1600" dirty="0" err="1">
-                <a:solidFill>
-                  <a:srgbClr val="595959"/>
-                </a:solidFill>
-                <a:latin typeface="HSE Sans"/>
-              </a:rPr>
-              <a:t>табличной</a:t>
-            </a:r>
-            <a:r>
-              <a:rPr sz="1600" dirty="0">
-                <a:solidFill>
-                  <a:srgbClr val="595959"/>
-                </a:solidFill>
-                <a:latin typeface="HSE Sans"/>
-              </a:rPr>
-              <a:t> </a:t>
-            </a:r>
-            <a:r>
-              <a:rPr sz="1600" dirty="0" err="1">
-                <a:solidFill>
-                  <a:srgbClr val="595959"/>
-                </a:solidFill>
-                <a:latin typeface="HSE Sans"/>
-              </a:rPr>
-              <a:t>части</a:t>
-            </a:r>
-            <a:r>
-              <a:rPr sz="1600" dirty="0">
-                <a:solidFill>
-                  <a:srgbClr val="595959"/>
-                </a:solidFill>
-                <a:latin typeface="HSE Sans"/>
-              </a:rPr>
-              <a:t> </a:t>
-            </a:r>
-            <a:r>
-              <a:rPr sz="1600" dirty="0" err="1">
-                <a:solidFill>
-                  <a:srgbClr val="595959"/>
-                </a:solidFill>
-                <a:latin typeface="HSE Sans"/>
-              </a:rPr>
-              <a:t>до</a:t>
-            </a:r>
-            <a:r>
-              <a:rPr sz="1600" dirty="0">
-                <a:solidFill>
-                  <a:srgbClr val="595959"/>
-                </a:solidFill>
-                <a:latin typeface="HSE Sans"/>
-              </a:rPr>
-              <a:t> </a:t>
-            </a:r>
-            <a:r>
-              <a:rPr sz="1600" dirty="0" err="1">
-                <a:solidFill>
-                  <a:srgbClr val="595959"/>
-                </a:solidFill>
-                <a:latin typeface="HSE Sans"/>
-              </a:rPr>
-              <a:t>обращения</a:t>
-            </a:r>
-            <a:r>
-              <a:rPr sz="1600" dirty="0">
-                <a:solidFill>
-                  <a:srgbClr val="595959"/>
-                </a:solidFill>
-                <a:latin typeface="HSE Sans"/>
-              </a:rPr>
-              <a:t> </a:t>
-            </a:r>
-            <a:r>
-              <a:rPr sz="1600" dirty="0" err="1">
-                <a:solidFill>
-                  <a:srgbClr val="595959"/>
-                </a:solidFill>
-                <a:latin typeface="HSE Sans"/>
-              </a:rPr>
-              <a:t>к</a:t>
-            </a:r>
-            <a:r>
-              <a:rPr sz="1600" dirty="0">
-                <a:solidFill>
-                  <a:srgbClr val="595959"/>
-                </a:solidFill>
-                <a:latin typeface="HSE Sans"/>
-              </a:rPr>
-              <a:t> LLM — </a:t>
-            </a:r>
-            <a:r>
-              <a:rPr sz="1600" dirty="0" err="1">
-                <a:solidFill>
-                  <a:srgbClr val="595959"/>
-                </a:solidFill>
-                <a:latin typeface="HSE Sans"/>
-              </a:rPr>
-              <a:t>бесплатно</a:t>
-            </a:r>
-            <a:r>
-              <a:rPr sz="1600" dirty="0">
-                <a:solidFill>
-                  <a:srgbClr val="595959"/>
-                </a:solidFill>
-                <a:latin typeface="HSE Sans"/>
-              </a:rPr>
-              <a:t> </a:t>
-            </a:r>
-            <a:r>
-              <a:rPr sz="1600" dirty="0" err="1">
-                <a:solidFill>
-                  <a:srgbClr val="595959"/>
-                </a:solidFill>
-                <a:latin typeface="HSE Sans"/>
-              </a:rPr>
-              <a:t>и</a:t>
-            </a:r>
-            <a:r>
-              <a:rPr sz="1600" dirty="0">
-                <a:solidFill>
-                  <a:srgbClr val="595959"/>
-                </a:solidFill>
-                <a:latin typeface="HSE Sans"/>
-              </a:rPr>
-              <a:t> </a:t>
-            </a:r>
-            <a:r>
-              <a:rPr sz="1600" dirty="0" err="1">
-                <a:solidFill>
-                  <a:srgbClr val="595959"/>
-                </a:solidFill>
-                <a:latin typeface="HSE Sans"/>
-              </a:rPr>
-              <a:t>мгновенно</a:t>
-            </a:r>
-            <a:r>
-              <a:rPr sz="1600" dirty="0">
-                <a:solidFill>
-                  <a:srgbClr val="595959"/>
-                </a:solidFill>
-                <a:latin typeface="HSE Sans"/>
-              </a:rPr>
-              <a:t> </a:t>
-            </a:r>
-            <a:r>
-              <a:rPr sz="1600" dirty="0" err="1">
-                <a:solidFill>
-                  <a:srgbClr val="595959"/>
-                </a:solidFill>
-                <a:latin typeface="HSE Sans"/>
-              </a:rPr>
-              <a:t>для</a:t>
-            </a:r>
-            <a:r>
-              <a:rPr sz="1600" dirty="0">
-                <a:solidFill>
-                  <a:srgbClr val="595959"/>
-                </a:solidFill>
-                <a:latin typeface="HSE Sans"/>
-              </a:rPr>
-              <a:t> </a:t>
-            </a:r>
-            <a:r>
-              <a:rPr sz="1600" dirty="0" err="1">
-                <a:solidFill>
-                  <a:srgbClr val="595959"/>
-                </a:solidFill>
-                <a:latin typeface="HSE Sans"/>
-              </a:rPr>
-              <a:t>типовых</a:t>
-            </a:r>
-            <a:r>
-              <a:rPr sz="1600" dirty="0">
-                <a:solidFill>
-                  <a:srgbClr val="595959"/>
-                </a:solidFill>
-                <a:latin typeface="HSE Sans"/>
-              </a:rPr>
-              <a:t> </a:t>
-            </a:r>
-            <a:r>
-              <a:rPr sz="1600" dirty="0" err="1">
-                <a:solidFill>
-                  <a:srgbClr val="595959"/>
-                </a:solidFill>
-                <a:latin typeface="HSE Sans"/>
-              </a:rPr>
-              <a:t>форматов</a:t>
             </a:r>
             <a:r>
               <a:rPr sz="1600" dirty="0">
@@ -25707,7 +25897,7 @@
                 </a:solidFill>
                 <a:latin typeface="HSE Sans"/>
               </a:rPr>
-              <a:t> К.С.   ·   </a:t>
+              <a:t> К.С.</a:t>
             </a:r>
             <a:endParaRPr lang="en-US" dirty="0">
               <a:solidFill>
@@ -25811,7 +26001,7 @@
                 </a:solidFill>
                 <a:latin typeface="HSE Sans"/>
               </a:rPr>
-              <a:t> Е.А.   ·   </a:t>
+              <a:t> Е.А.</a:t>
             </a:r>
             <a:endParaRPr lang="en-US" dirty="0">
               <a:solidFill>
@@ -25933,7 +26123,7 @@
                 </a:solidFill>
                 <a:latin typeface="HSE Sans"/>
               </a:rPr>
-              <a:t> О.Ю.   ·   </a:t>
+              <a:t> О.Ю.</a:t>
             </a:r>
             <a:endParaRPr lang="en-US" dirty="0">
               <a:solidFill>
@@ -28750,7 +28940,7 @@
         <p:spPr>
           <a:xfrm>
             <a:off x="484095" y="2890391"/>
-            <a:ext cx="2743200" cy="1077218"/>
+            <a:ext cx="2971800" cy="1077218"/>
           </a:xfrm>
           <a:prstGeom prst="rect">
             <a:avLst/>
@@ -31502,6 +31692,15 @@
 </file>
 
 <file path=customXml/item1.xml><?xml version="1.0" encoding="utf-8"?>
+<?mso-contentType ?>
+<FormTemplates xmlns="http://schemas.microsoft.com/sharepoint/v3/contenttype/forms">
+  <Display>DocumentLibraryForm</Display>
+  <Edit>DocumentLibraryForm</Edit>
+  <New>DocumentLibraryForm</New>
+</FormTemplates>
+</file>
+
+<file path=customXml/item2.xml><?xml version="1.0" encoding="utf-8"?>
 <ct:contentTypeSchema xmlns:ct="http://schemas.microsoft.com/office/2006/metadata/contentType" xmlns:ma="http://schemas.microsoft.com/office/2006/metadata/properties/metaAttributes" ct:_="" ma:_="" ma:contentTypeName="Документ" ma:contentTypeID="0x0101002A9C74E6E830D74E9B0FDDB4017A5417" ma:contentTypeVersion="13" ma:contentTypeDescription="Создание документа." ma:contentTypeScope="" ma:versionID="d4e423622451d608a8a05f4da7a1e1a2">
   <xsd:schema xmlns:xsd="http://www.w3.org/2001/XMLSchema" xmlns:xs="http://www.w3.org/2001/XMLSchema" xmlns:p="http://schemas.microsoft.com/office/2006/metadata/properties" xmlns:ns2="9875bd71-cde8-496c-a136-433f55d5e6d0" xmlns:ns3="e96afe77-3acb-4328-97fc-408e1bde3ecd" targetNamespace="http://schemas.microsoft.com/office/2006/metadata/properties" ma:root="true" ma:fieldsID="4831203c63c08b9f52ea6d3ee0d7a96e" ns2:_="" ns3:_="">
     <xsd:import namespace="9875bd71-cde8-496c-a136-433f55d5e6d0"/>
@@ -31724,22 +31923,21 @@
 </ct:contentTypeSchema>
 </file>
 
-<file path=customXml/item2.xml><?xml version="1.0" encoding="utf-8"?>
+<file path=customXml/item3.xml><?xml version="1.0" encoding="utf-8"?>
 <p:properties xmlns:p="http://schemas.microsoft.com/office/2006/metadata/properties" xmlns:xsi="http://www.w3.org/2001/XMLSchema-instance" xmlns:pc="http://schemas.microsoft.com/office/infopath/2007/PartnerControls">
   <documentManagement/>
 </p:properties>
 </file>
 
-<file path=customXml/item3.xml><?xml version="1.0" encoding="utf-8"?>
-<?mso-contentType ?>
-<FormTemplates xmlns="http://schemas.microsoft.com/sharepoint/v3/contenttype/forms">
-  <Display>DocumentLibraryForm</Display>
-  <Edit>DocumentLibraryForm</Edit>
-  <New>DocumentLibraryForm</New>
-</FormTemplates>
+<file path=customXml/itemProps1.xml><?xml version="1.0" encoding="utf-8"?>
+<ds:datastoreItem xmlns:ds="http://schemas.openxmlformats.org/officeDocument/2006/customXml" ds:itemID="{B34386AA-1848-4C75-B336-1053927CB025}">
+  <ds:schemaRefs>
+    <ds:schemaRef ds:uri="http://schemas.microsoft.com/sharepoint/v3/contenttype/forms"/>
+  </ds:schemaRefs>
+</ds:datastoreItem>
 </file>
 
-<file path=customXml/itemProps1.xml><?xml version="1.0" encoding="utf-8"?>
+<file path=customXml/itemProps2.xml><?xml version="1.0" encoding="utf-8"?>
 <ds:datastoreItem xmlns:ds="http://schemas.openxmlformats.org/officeDocument/2006/customXml" ds:itemID="{4D4651DD-DCCC-4759-B2F6-7F520BDCC2B9}">
   <ds:schemaRefs>
     <ds:schemaRef ds:uri="http://schemas.microsoft.com/office/2006/metadata/contentType"/>
@@ -31758,7 +31956,7 @@
 </ds:datastoreItem>
 </file>
 
-<file path=customXml/itemProps2.xml><?xml version="1.0" encoding="utf-8"?>
+<file path=customXml/itemProps3.xml><?xml version="1.0" encoding="utf-8"?>
 <ds:datastoreItem xmlns:ds="http://schemas.openxmlformats.org/officeDocument/2006/customXml" ds:itemID="{433DAF31-D8A6-49A0-9A5D-8B2EA5B1C511}">
   <ds:schemaRefs>
     <ds:schemaRef ds:uri="http://purl.org/dc/elements/1.1/"/>
@@ -31773,12 +31971,4 @@
     <ds:schemaRef ds:uri="9875bd71-cde8-496c-a136-433f55d5e6d0"/>
   </ds:schemaRefs>
 </ds:datastoreItem>
-</file>
-
-<file path=customXml/itemProps3.xml><?xml version="1.0" encoding="utf-8"?>
-<ds:datastoreItem xmlns:ds="http://schemas.openxmlformats.org/officeDocument/2006/customXml" ds:itemID="{B34386AA-1848-4C75-B336-1053927CB025}">
-  <ds:schemaRefs>
-    <ds:schemaRef ds:uri="http://schemas.microsoft.com/sharepoint/v3/contenttype/forms"/>
-  </ds:schemaRefs>
-</ds:datastoreItem>
 </file>